--- a/jumanchu/docs/wireframe_jam/와이어프레임-마이페이지.pptx
+++ b/jumanchu/docs/wireframe_jam/와이어프레임-마이페이지.pptx
@@ -3641,52 +3641,6 @@
           </a:prstGeom>
         </p:spPr>
       </p:pic>
-      <p:sp>
-        <p:nvSpPr>
-          <p:cNvPr id="14" name="직사각형 13">
-            <a:extLst>
-              <a:ext uri="{FF2B5EF4-FFF2-40B4-BE49-F238E27FC236}">
-                <a16:creationId xmlns:a16="http://schemas.microsoft.com/office/drawing/2014/main" id="{0C9FF6CD-158D-58D1-FE9C-7659EC19E5F4}"/>
-              </a:ext>
-            </a:extLst>
-          </p:cNvPr>
-          <p:cNvSpPr/>
-          <p:nvPr/>
-        </p:nvSpPr>
-        <p:spPr>
-          <a:xfrm>
-            <a:off x="2306558" y="3762923"/>
-            <a:ext cx="3403601" cy="491577"/>
-          </a:xfrm>
-          <a:prstGeom prst="rect">
-            <a:avLst/>
-          </a:prstGeom>
-        </p:spPr>
-        <p:style>
-          <a:lnRef idx="2">
-            <a:schemeClr val="accent1">
-              <a:shade val="15000"/>
-            </a:schemeClr>
-          </a:lnRef>
-          <a:fillRef idx="1">
-            <a:schemeClr val="accent1"/>
-          </a:fillRef>
-          <a:effectRef idx="0">
-            <a:schemeClr val="accent1"/>
-          </a:effectRef>
-          <a:fontRef idx="minor">
-            <a:schemeClr val="lt1"/>
-          </a:fontRef>
-        </p:style>
-        <p:txBody>
-          <a:bodyPr rtlCol="0" anchor="ctr"/>
-          <a:lstStyle/>
-          <a:p>
-            <a:pPr algn="ctr"/>
-            <a:endParaRPr lang="ko-KR" altLang="en-US"/>
-          </a:p>
-        </p:txBody>
-      </p:sp>
     </p:spTree>
     <p:extLst>
       <p:ext uri="{BB962C8B-B14F-4D97-AF65-F5344CB8AC3E}">
@@ -3916,6 +3870,36 @@
           </a:prstGeom>
         </p:spPr>
       </p:pic>
+      <p:pic>
+        <p:nvPicPr>
+          <p:cNvPr id="7" name="그림 6">
+            <a:extLst>
+              <a:ext uri="{FF2B5EF4-FFF2-40B4-BE49-F238E27FC236}">
+                <a16:creationId xmlns:a16="http://schemas.microsoft.com/office/drawing/2014/main" id="{71C32013-5717-02FF-E032-D1BC1B43F4A4}"/>
+              </a:ext>
+            </a:extLst>
+          </p:cNvPr>
+          <p:cNvPicPr>
+            <a:picLocks noChangeAspect="1"/>
+          </p:cNvPicPr>
+          <p:nvPr/>
+        </p:nvPicPr>
+        <p:blipFill>
+          <a:blip r:embed="rId6"/>
+          <a:stretch>
+            <a:fillRect/>
+          </a:stretch>
+        </p:blipFill>
+        <p:spPr>
+          <a:xfrm>
+            <a:off x="1949225" y="4293120"/>
+            <a:ext cx="5626144" cy="3533250"/>
+          </a:xfrm>
+          <a:prstGeom prst="rect">
+            <a:avLst/>
+          </a:prstGeom>
+        </p:spPr>
+      </p:pic>
     </p:spTree>
     <p:extLst>
       <p:ext uri="{BB962C8B-B14F-4D97-AF65-F5344CB8AC3E}">
@@ -5057,10 +5041,10 @@
       </p:pic>
       <p:sp>
         <p:nvSpPr>
-          <p:cNvPr id="9" name="직사각형 8">
-            <a:extLst>
-              <a:ext uri="{FF2B5EF4-FFF2-40B4-BE49-F238E27FC236}">
-                <a16:creationId xmlns:a16="http://schemas.microsoft.com/office/drawing/2014/main" id="{6C442A0E-C06C-34FD-49A2-400B527A8334}"/>
+          <p:cNvPr id="11" name="직사각형 10">
+            <a:extLst>
+              <a:ext uri="{FF2B5EF4-FFF2-40B4-BE49-F238E27FC236}">
+                <a16:creationId xmlns:a16="http://schemas.microsoft.com/office/drawing/2014/main" id="{8C132A6F-9571-12E8-AF38-2D9E40588CCD}"/>
               </a:ext>
             </a:extLst>
           </p:cNvPr>
@@ -5069,8 +5053,8 @@
         </p:nvSpPr>
         <p:spPr>
           <a:xfrm>
-            <a:off x="2007396" y="1930400"/>
-            <a:ext cx="3665536" cy="1449255"/>
+            <a:off x="360363" y="1930400"/>
+            <a:ext cx="1524000" cy="2324100"/>
           </a:xfrm>
           <a:prstGeom prst="rect">
             <a:avLst/>
@@ -5098,144 +5082,6 @@
           <a:p>
             <a:pPr algn="ctr"/>
             <a:r>
-              <a:rPr lang="ko-KR" altLang="en-US" dirty="0"/>
-              <a:t>계좌 정보</a:t>
-            </a:r>
-            <a:endParaRPr lang="en-US" altLang="ko-KR" dirty="0"/>
-          </a:p>
-          <a:p>
-            <a:pPr algn="ctr"/>
-            <a:r>
-              <a:rPr lang="ko-KR" altLang="en-US" dirty="0"/>
-              <a:t>잔액 </a:t>
-            </a:r>
-            <a:r>
-              <a:rPr lang="en-US" altLang="ko-KR" dirty="0"/>
-              <a:t>/ </a:t>
-            </a:r>
-            <a:r>
-              <a:rPr lang="ko-KR" altLang="en-US" dirty="0"/>
-              <a:t>현재 수익률</a:t>
-            </a:r>
-          </a:p>
-        </p:txBody>
-      </p:sp>
-      <p:sp>
-        <p:nvSpPr>
-          <p:cNvPr id="10" name="직사각형 9">
-            <a:extLst>
-              <a:ext uri="{FF2B5EF4-FFF2-40B4-BE49-F238E27FC236}">
-                <a16:creationId xmlns:a16="http://schemas.microsoft.com/office/drawing/2014/main" id="{327AAD89-1285-28CB-D530-48C2E4C06B86}"/>
-              </a:ext>
-            </a:extLst>
-          </p:cNvPr>
-          <p:cNvSpPr/>
-          <p:nvPr/>
-        </p:nvSpPr>
-        <p:spPr>
-          <a:xfrm>
-            <a:off x="5795965" y="1930400"/>
-            <a:ext cx="3665536" cy="1449255"/>
-          </a:xfrm>
-          <a:prstGeom prst="rect">
-            <a:avLst/>
-          </a:prstGeom>
-        </p:spPr>
-        <p:style>
-          <a:lnRef idx="2">
-            <a:schemeClr val="accent1">
-              <a:shade val="15000"/>
-            </a:schemeClr>
-          </a:lnRef>
-          <a:fillRef idx="1">
-            <a:schemeClr val="accent1"/>
-          </a:fillRef>
-          <a:effectRef idx="0">
-            <a:schemeClr val="accent1"/>
-          </a:effectRef>
-          <a:fontRef idx="minor">
-            <a:schemeClr val="lt1"/>
-          </a:fontRef>
-        </p:style>
-        <p:txBody>
-          <a:bodyPr rtlCol="0" anchor="ctr"/>
-          <a:lstStyle/>
-          <a:p>
-            <a:pPr algn="ctr"/>
-            <a:r>
-              <a:rPr lang="ko-KR" altLang="en-US" dirty="0"/>
-              <a:t>보유 종목 현황</a:t>
-            </a:r>
-            <a:endParaRPr lang="en-US" altLang="ko-KR" dirty="0"/>
-          </a:p>
-          <a:p>
-            <a:pPr algn="ctr"/>
-            <a:r>
-              <a:rPr lang="ko-KR" altLang="en-US" dirty="0"/>
-              <a:t>보유 종목 </a:t>
-            </a:r>
-            <a:r>
-              <a:rPr lang="en-US" altLang="ko-KR" dirty="0"/>
-              <a:t>/ </a:t>
-            </a:r>
-            <a:r>
-              <a:rPr lang="ko-KR" altLang="en-US" dirty="0"/>
-              <a:t>보유 수 </a:t>
-            </a:r>
-            <a:r>
-              <a:rPr lang="en-US" altLang="ko-KR" dirty="0"/>
-              <a:t>/ </a:t>
-            </a:r>
-            <a:r>
-              <a:rPr lang="ko-KR" altLang="en-US" dirty="0"/>
-              <a:t>현재 수익률</a:t>
-            </a:r>
-          </a:p>
-        </p:txBody>
-      </p:sp>
-      <p:sp>
-        <p:nvSpPr>
-          <p:cNvPr id="11" name="직사각형 10">
-            <a:extLst>
-              <a:ext uri="{FF2B5EF4-FFF2-40B4-BE49-F238E27FC236}">
-                <a16:creationId xmlns:a16="http://schemas.microsoft.com/office/drawing/2014/main" id="{8C132A6F-9571-12E8-AF38-2D9E40588CCD}"/>
-              </a:ext>
-            </a:extLst>
-          </p:cNvPr>
-          <p:cNvSpPr/>
-          <p:nvPr/>
-        </p:nvSpPr>
-        <p:spPr>
-          <a:xfrm>
-            <a:off x="360363" y="1930400"/>
-            <a:ext cx="1524000" cy="2324100"/>
-          </a:xfrm>
-          <a:prstGeom prst="rect">
-            <a:avLst/>
-          </a:prstGeom>
-        </p:spPr>
-        <p:style>
-          <a:lnRef idx="2">
-            <a:schemeClr val="accent1">
-              <a:shade val="15000"/>
-            </a:schemeClr>
-          </a:lnRef>
-          <a:fillRef idx="1">
-            <a:schemeClr val="accent1"/>
-          </a:fillRef>
-          <a:effectRef idx="0">
-            <a:schemeClr val="accent1"/>
-          </a:effectRef>
-          <a:fontRef idx="minor">
-            <a:schemeClr val="lt1"/>
-          </a:fontRef>
-        </p:style>
-        <p:txBody>
-          <a:bodyPr rtlCol="0" anchor="ctr"/>
-          <a:lstStyle/>
-          <a:p>
-            <a:pPr algn="ctr"/>
-            <a:r>
               <a:rPr lang="ko-KR" altLang="en-US" b="1" dirty="0"/>
               <a:t>내 투자</a:t>
             </a:r>
@@ -5288,7 +5134,7 @@
         </p:blipFill>
         <p:spPr>
           <a:xfrm>
-            <a:off x="2007396" y="3521733"/>
+            <a:off x="2007396" y="4616925"/>
             <a:ext cx="7529475" cy="5914367"/>
           </a:xfrm>
           <a:prstGeom prst="rect">
@@ -5397,6 +5243,67 @@
           </a:p>
         </p:txBody>
       </p:sp>
+      <p:pic>
+        <p:nvPicPr>
+          <p:cNvPr id="4" name="그림 3">
+            <a:extLst>
+              <a:ext uri="{FF2B5EF4-FFF2-40B4-BE49-F238E27FC236}">
+                <a16:creationId xmlns:a16="http://schemas.microsoft.com/office/drawing/2014/main" id="{0F69043E-82AF-FD76-60DD-0712A5E0D29D}"/>
+              </a:ext>
+            </a:extLst>
+          </p:cNvPr>
+          <p:cNvPicPr>
+            <a:picLocks noChangeAspect="1"/>
+          </p:cNvPicPr>
+          <p:nvPr/>
+        </p:nvPicPr>
+        <p:blipFill>
+          <a:blip r:embed="rId5"/>
+          <a:srcRect l="35277"/>
+          <a:stretch>
+            <a:fillRect/>
+          </a:stretch>
+        </p:blipFill>
+        <p:spPr>
+          <a:xfrm>
+            <a:off x="4656932" y="1896748"/>
+            <a:ext cx="4861179" cy="2611751"/>
+          </a:xfrm>
+          <a:prstGeom prst="rect">
+            <a:avLst/>
+          </a:prstGeom>
+        </p:spPr>
+      </p:pic>
+      <p:pic>
+        <p:nvPicPr>
+          <p:cNvPr id="14" name="그림 13">
+            <a:extLst>
+              <a:ext uri="{FF2B5EF4-FFF2-40B4-BE49-F238E27FC236}">
+                <a16:creationId xmlns:a16="http://schemas.microsoft.com/office/drawing/2014/main" id="{317DEBF3-CF5B-F539-7B3E-4EF34797E930}"/>
+              </a:ext>
+            </a:extLst>
+          </p:cNvPr>
+          <p:cNvPicPr>
+            <a:picLocks noChangeAspect="1"/>
+          </p:cNvPicPr>
+          <p:nvPr/>
+        </p:nvPicPr>
+        <p:blipFill>
+          <a:blip r:embed="rId6"/>
+          <a:stretch>
+            <a:fillRect/>
+          </a:stretch>
+        </p:blipFill>
+        <p:spPr>
+          <a:xfrm>
+            <a:off x="2058175" y="1896748"/>
+            <a:ext cx="2424945" cy="2578099"/>
+          </a:xfrm>
+          <a:prstGeom prst="rect">
+            <a:avLst/>
+          </a:prstGeom>
+        </p:spPr>
+      </p:pic>
     </p:spTree>
     <p:extLst>
       <p:ext uri="{BB962C8B-B14F-4D97-AF65-F5344CB8AC3E}">
